--- a/docs/Z-MAX产品培训-L2基线版.pptx
+++ b/docs/Z-MAX产品培训-L2基线版.pptx
@@ -3344,7 +3344,7 @@
               </a:defRPr>
             </a:pPr>
             <a:r>
-              <a:t>关键工序良率         95~97%                ≥99.2%</a:t>
+              <a:t>关键工序良率         95~97%                大于99%</a:t>
             </a:r>
           </a:p>
           <a:p>
@@ -3718,7 +3718,7 @@
               </a:defRPr>
             </a:pPr>
             <a:r>
-              <a:t>    关键工序良率 ≥99.2% · XSpace Studio 一键操控</a:t>
+              <a:t>    关键工序良率 大于99% · XSpace Studio 一键操控</a:t>
             </a:r>
           </a:p>
           <a:p>
@@ -3817,7 +3817,7 @@
               </a:defRPr>
             </a:pPr>
             <a:r>
-              <a:t>    VLA 视觉语言动作模型 · 新模块自动适配</a:t>
+              <a:t>    多模态视觉语言动作混合模型 · 新模块自动适配</a:t>
             </a:r>
           </a:p>
           <a:p>
